--- a/projetos/gestao-ia-planilhas/produto/kit-medicos/entrega/29-modelo-convenios-para-o-contador-8-slides.pptx
+++ b/projetos/gestao-ia-planilhas/produto/kit-medicos/entrega/29-modelo-convenios-para-o-contador-8-slides.pptx
@@ -215,7 +215,7 @@
                   <c:v>2130</c:v>
                 </c:pt>
                 <c:pt idx="3">
-                  <c:v>5315</c:v>
+                  <c:v>4630</c:v>
                 </c:pt>
                 <c:pt idx="4">
                   <c:v>7320</c:v>
@@ -769,7 +769,7 @@
           <a:p>
             <a:r>
               <a:rPr lang="en-US" dirty="0"/>
-              <a:t>Kit de Gestão para Médicos · modelo v1.0 · set/2026 · Modelo do Kit de Gestão para Médicos (v1.0, set/2026): troque os textos e mantenha a estrutura. O símbolo do canto está no slide mestre (Exibir &gt; Slide mestre): apague lá uma vez e some de todos. Capa. Reunião de 30 minutos: os números vêm prontos das planilhas 09 (Caixa, Config = Agosto), 13 (Convênios), 16 (Conciliação de cartão), 10 (Provisão), 11 (Repasse e pró-labore) e 12 (Reserva); o contador recebe os arquivos do slide 8 dois dias antes. O roteiro da reunião está no bônus 24. Só totais: nenhum nome de paciente, nenhuma guia por pessoa.</a:t>
+              <a:t>Kit de Gestão para Médicos · modelo v1.0 · set/2026 · Modelo do Kit de Gestão para Médicos (v1.0, set/2026): troque os textos e mantenha a estrutura. O símbolo do canto está nos dois layouts, Claro e Escuro (Exibir &gt; Slide mestre): apague o símbolo nos dois e ele some de todos os slides. Capa. Reunião de 30 minutos: os números vêm prontos das planilhas 09 (Caixa, Config = Agosto), 13 (Convênios), 16 (Conciliação de cartão), 10 (Provisão), 11 (Repasse e pró-labore) e 12 (Reserva); o contador recebe os arquivos do slide 8 dois dias antes. O roteiro da reunião está no bônus 24. Só totais: nenhum nome de paciente, nenhuma guia por pessoa.</a:t>
             </a:r>
             <a:endParaRPr lang="en-US" dirty="0"/>
           </a:p>
@@ -1385,7 +1385,7 @@
           <a:p>
             <a:r>
               <a:rPr lang="en-US" dirty="0"/>
-              <a:t>Kit de Gestão para Médicos · modelo v1.0 · set/2026 · Anexos. Diga exatamente que arquivo e que aba o contador recebe. Nunca a Agenda (01), a aba Guias da 13 nem a lista de parcelas da 14: só totais. Dado de saúde é sensível e nome de paciente com procedimento já é dado de saúde. Envie dois dias antes da reunião e termine com a data da próxima.</a:t>
+              <a:t>Kit de Gestão para Médicos · modelo v1.0 · set/2026 · Anexos. Diga exatamente que arquivo e que aba o contador recebe, e mande o Painel como cópia de valores ou PDF. Nunca a Agenda (01), a aba Lançamentos da 09, a aba Vendas da 16, a aba Guias da 13 nem a lista de parcelas da 14: só totais. Dado de saúde é sensível e nome de paciente com procedimento já é dado de saúde. Envie dois dias antes da reunião e termine com a data da próxima.</a:t>
             </a:r>
             <a:endParaRPr lang="en-US" dirty="0"/>
           </a:p>
@@ -2146,7 +2146,7 @@
                 <a:ea typeface="Arial" pitchFamily="34" charset="-122"/>
                 <a:cs typeface="Arial" pitchFamily="34" charset="-120"/>
               </a:rPr>
-              <a:t>Entrou R$ 50.336, saiu R$ 41.620, sobrou R$ 8.716; convênios pagos no mês R$ 11.161, com R$ 665 de glosa. Oito dúvidas no slide 7.</a:t>
+              <a:t>Entrou R$ 49.651, saiu R$ 41.660, sobrou R$ 7.991; convênios pagos no mês R$ 11.161, com R$ 665 de glosa. Oito dúvidas no slide 7.</a:t>
             </a:r>
             <a:endParaRPr lang="en-US" sz="1400" dirty="0"/>
           </a:p>
@@ -2251,7 +2251,7 @@
                 <a:ea typeface="Arial" pitchFamily="34" charset="-122"/>
                 <a:cs typeface="Arial" pitchFamily="34" charset="-120"/>
               </a:rPr>
-              <a:t>Recebimentos de agosto (regime de caixa), Caixa da clínica (09), aba Painel "De onde veio o dinheiro". Total: R$ 50.336.</a:t>
+              <a:t>Recebimentos de agosto (regime de caixa), Caixa da clínica (09), aba Painel "De onde veio o dinheiro". Total: R$ 49.651.</a:t>
             </a:r>
             <a:endParaRPr lang="en-US" sz="1200" dirty="0"/>
           </a:p>
@@ -2330,7 +2330,7 @@
                 <a:ea typeface="Arial" pitchFamily="34" charset="-122"/>
                 <a:cs typeface="Arial" pitchFamily="34" charset="-120"/>
               </a:rPr>
-              <a:t>Julho: R$ 53.101 (−5,2 %). Particular à vista entra pelo fechamento do dia (uma linha por dia e forma de pagamento); a prazo, quando a parcela cai; convênio, quando o lote é pago, já descontada a glosa.</a:t>
+              <a:t>Julho: R$ 53.461 (−7,1 %). Particular à vista entra pelo fechamento do dia (uma linha por dia e forma de pagamento); a prazo, quando a parcela cai; convênio, quando o lote é pago, já descontada a glosa.</a:t>
             </a:r>
             <a:endParaRPr lang="en-US" sz="1000" dirty="0"/>
           </a:p>
@@ -2372,7 +2372,7 @@
                 <a:ea typeface="Arial" pitchFamily="34" charset="-122"/>
                 <a:cs typeface="Arial" pitchFamily="34" charset="-120"/>
               </a:rPr>
-              <a:t>De janeiro a agosto: R$ 337.587 recebidos (à vista R$ 232.200, a prazo R$ 37.045, Saúde Total R$ 39.925, MediPlan R$ 16.250, Vida Care R$ 11.547, outras entradas R$ 620).</a:t>
+              <a:t>De janeiro a agosto: R$ 337.967 recebidos (à vista R$ 235.370, a prazo R$ 34.255, Saúde Total R$ 39.925, MediPlan R$ 16.250, Vida Care R$ 11.547, outras entradas R$ 620).</a:t>
             </a:r>
             <a:endParaRPr lang="en-US" sz="1000" dirty="0"/>
           </a:p>
@@ -7635,7 +7635,7 @@
                 <a:ea typeface="Arial" pitchFamily="34" charset="-122"/>
                 <a:cs typeface="Arial" pitchFamily="34" charset="-120"/>
               </a:rPr>
-              <a:t>As taxas de agosto (R$ 484,12) equivalem a 1,3 consultas particulares; no ano, R$ 3.530 até agosto. O crédito parcelado é 14 % das vendas e a maior taxa. Ainda vai cair na conta R$ 10.899 (parcelas de crédito de julho e agosto); R$ 4.048 aguardam conferência no extrato da operadora.</a:t>
+              <a:t>As taxas de agosto (R$ 484,12) equivalem a 1,3 consultas particulares; no ano, R$ 3.530 até agosto. O crédito parcelado é 14 % das vendas e a maior taxa. Ainda vai cair na conta R$ 12.388 (parcelas de crédito de julho, agosto e setembro); R$ 3.865 aguardam conferência no extrato da operadora.</a:t>
             </a:r>
             <a:endParaRPr lang="en-US" sz="1000" dirty="0"/>
           </a:p>
@@ -8223,7 +8223,7 @@
                           <a:ea typeface="Arial" pitchFamily="34" charset="-122"/>
                           <a:cs typeface="Arial" pitchFamily="34" charset="-120"/>
                         </a:rPr>
-                        <a:t>5.537</a:t>
+                        <a:t>5.462</a:t>
                       </a:r>
                       <a:endParaRPr lang="en-US" sz="950" dirty="0">
                         <a:latin typeface="Arial" charset="0"/>
@@ -8291,7 +8291,7 @@
                           <a:ea typeface="Arial" pitchFamily="34" charset="-122"/>
                           <a:cs typeface="Arial" pitchFamily="34" charset="-120"/>
                         </a:rPr>
-                        <a:t>37.067</a:t>
+                        <a:t>37.109</a:t>
                       </a:r>
                       <a:endParaRPr lang="en-US" sz="950" dirty="0">
                         <a:latin typeface="Arial" charset="0"/>
@@ -9034,7 +9034,7 @@
                           <a:ea typeface="Arial" pitchFamily="34" charset="-122"/>
                           <a:cs typeface="Arial" pitchFamily="34" charset="-120"/>
                         </a:rPr>
-                        <a:t>7.499</a:t>
+                        <a:t>7.424</a:t>
                       </a:r>
                       <a:endParaRPr lang="en-US" sz="950" dirty="0">
                         <a:latin typeface="Arial" charset="0"/>
@@ -9102,7 +9102,7 @@
                           <a:ea typeface="Arial" pitchFamily="34" charset="-122"/>
                           <a:cs typeface="Arial" pitchFamily="34" charset="-120"/>
                         </a:rPr>
-                        <a:t>52.763</a:t>
+                        <a:t>52.805</a:t>
                       </a:r>
                       <a:endParaRPr lang="en-US" sz="950" dirty="0">
                         <a:latin typeface="Arial" charset="0"/>
@@ -9240,7 +9240,7 @@
                           <a:ea typeface="Arial" pitchFamily="34" charset="-122"/>
                           <a:cs typeface="Arial" pitchFamily="34" charset="-120"/>
                         </a:rPr>
-                        <a:t>11 % das entradas do mês anterior, dia 20 (agosto: sobre os R$ 53.101 de julho)</a:t>
+                        <a:t>11 % das entradas do mês anterior, dia 20 (agosto: sobre os R$ 53.461 de julho)</a:t>
                       </a:r>
                       <a:endParaRPr lang="en-US" sz="950" dirty="0">
                         <a:latin typeface="Arial" charset="0"/>
@@ -9308,7 +9308,7 @@
                           <a:ea typeface="Arial" pitchFamily="34" charset="-122"/>
                           <a:cs typeface="Arial" pitchFamily="34" charset="-120"/>
                         </a:rPr>
-                        <a:t>5.841</a:t>
+                        <a:t>5.881</a:t>
                       </a:r>
                       <a:endParaRPr lang="en-US" sz="950" dirty="0">
                         <a:latin typeface="Arial" charset="0"/>
@@ -9376,7 +9376,7 @@
                           <a:ea typeface="Arial" pitchFamily="34" charset="-122"/>
                           <a:cs typeface="Arial" pitchFamily="34" charset="-120"/>
                         </a:rPr>
-                        <a:t>35.160</a:t>
+                        <a:t>35.277</a:t>
                       </a:r>
                       <a:endParaRPr lang="en-US" sz="950" dirty="0">
                         <a:latin typeface="Arial" charset="0"/>
@@ -9639,7 +9639,7 @@
                           <a:ea typeface="Arial" pitchFamily="34" charset="-122"/>
                           <a:cs typeface="Arial" pitchFamily="34" charset="-120"/>
                         </a:rPr>
-                        <a:t>17.602</a:t>
+                        <a:t>17.527</a:t>
                       </a:r>
                       <a:endParaRPr lang="en-US" sz="950" dirty="0">
                         <a:latin typeface="Arial" charset="0"/>
@@ -9752,7 +9752,7 @@
                 <a:ea typeface="Arial" pitchFamily="34" charset="-122"/>
                 <a:cs typeface="Arial" pitchFamily="34" charset="-120"/>
               </a:rPr>
-              <a:t>Alvo: três meses de custo fixo com pró-labore (R$ 84.000). Guardado: R$ 14.000. Aporte proposto pelos sócios: R$ 3.000 por mês a partir de setembro. Guia de setembro (20/09): R$ 5.537.</a:t>
+              <a:t>Alvo: três meses de custo fixo com pró-labore (R$ 89.197, a média de junho a agosto). Guardado: R$ 14.000. Aporte proposto pelos sócios: R$ 3.000 por mês a partir de setembro. Guia de setembro (20/09): R$ 5.462.</a:t>
             </a:r>
             <a:endParaRPr lang="en-US" sz="950" dirty="0"/>
           </a:p>
@@ -12386,7 +12386,7 @@
                 <a:ea typeface="Arial" pitchFamily="34" charset="-122"/>
                 <a:cs typeface="Arial" pitchFamily="34" charset="-120"/>
               </a:rPr>
-              <a:t>Regra: 50 % do resultado do trimestre fechado após pró-labore, paga dia 10 do mês seguinte. 1º trimestre: −R$ 2.791, sem distribuição. 2º trimestre: R$ 7.182, R$ 3.591 pagos em julho. 3º trimestre em andamento: R$ 12.891 até 11/09.</a:t>
+              <a:t>Regra: 50 % do resultado do trimestre fechado após pró-labore, paga dia 10 do mês seguinte. 1º trimestre: −R$ 2.341, sem distribuição. 2º trimestre: R$ 7.394, R$ 3.697 pagos em julho. 3º trimestre em andamento: R$ 12.842 até 11/09.</a:t>
             </a:r>
             <a:endParaRPr lang="en-US" sz="850" dirty="0"/>
           </a:p>
@@ -12790,7 +12790,7 @@
               <a:buChar char="•"/>
             </a:pPr>
             <a:r>
-              <a:rPr lang="en-US" sz="1200" dirty="0">
+              <a:rPr lang="en-US" sz="1100" dirty="0">
                 <a:solidFill>
                   <a:srgbClr val="FFFFFF"/>
                 </a:solidFill>
@@ -12798,9 +12798,9 @@
                 <a:ea typeface="Arial" pitchFamily="34" charset="-122"/>
                 <a:cs typeface="Arial" pitchFamily="34" charset="-120"/>
               </a:rPr>
-              <a:t>09 · Caixa da clínica: aba Painel com Config = Agosto (entradas por origem e saídas por categoria) e as notas fiscais do mês.</a:t>
+              <a:t>09 · Caixa da clínica: só a aba Painel com Config = Agosto (entradas por origem, saídas por categoria), em cópia de valores ou em PDF, mais as notas fiscais do mês. A aba Lançamentos não vai: tem nome de paciente com procedimento.</a:t>
             </a:r>
-            <a:endParaRPr lang="en-US" sz="1200" dirty="0"/>
+            <a:endParaRPr lang="en-US" sz="1100" dirty="0"/>
           </a:p>
           <a:p>
             <a:pPr marL="342900" indent="-342900">
@@ -12811,7 +12811,7 @@
               <a:buChar char="•"/>
             </a:pPr>
             <a:r>
-              <a:rPr lang="en-US" sz="1200" dirty="0">
+              <a:rPr lang="en-US" sz="1100" dirty="0">
                 <a:solidFill>
                   <a:srgbClr val="FFFFFF"/>
                 </a:solidFill>
@@ -12821,7 +12821,7 @@
               </a:rPr>
               <a:t>10 · Provisão de impostos, 13º e férias: aba Painel.</a:t>
             </a:r>
-            <a:endParaRPr lang="en-US" sz="1200" dirty="0"/>
+            <a:endParaRPr lang="en-US" sz="1100" dirty="0"/>
           </a:p>
           <a:p>
             <a:pPr marL="342900" indent="-342900">
@@ -12832,7 +12832,7 @@
               <a:buChar char="•"/>
             </a:pPr>
             <a:r>
-              <a:rPr lang="en-US" sz="1200" dirty="0">
+              <a:rPr lang="en-US" sz="1100" dirty="0">
                 <a:solidFill>
                   <a:srgbClr val="FFFFFF"/>
                 </a:solidFill>
@@ -12842,7 +12842,7 @@
               </a:rPr>
               <a:t>11 · Repasse e pró-labore: aba Painel ("Médicos parceiros" e "Sócios no ano").</a:t>
             </a:r>
-            <a:endParaRPr lang="en-US" sz="1200" dirty="0"/>
+            <a:endParaRPr lang="en-US" sz="1100" dirty="0"/>
           </a:p>
           <a:p>
             <a:pPr marL="342900" indent="-342900">
@@ -12853,7 +12853,7 @@
               <a:buChar char="•"/>
             </a:pPr>
             <a:r>
-              <a:rPr lang="en-US" sz="1200" dirty="0">
+              <a:rPr lang="en-US" sz="1100" dirty="0">
                 <a:solidFill>
                   <a:srgbClr val="FFFFFF"/>
                 </a:solidFill>
@@ -12863,7 +12863,7 @@
               </a:rPr>
               <a:t>13 · Convênios a receber: só os cartões e a tabela "Por convênio" do Painel, copiados para o slide 3. Sem a aba Guias, sem nome de paciente.</a:t>
             </a:r>
-            <a:endParaRPr lang="en-US" sz="1200" dirty="0"/>
+            <a:endParaRPr lang="en-US" sz="1100" dirty="0"/>
           </a:p>
           <a:p>
             <a:pPr marL="342900" indent="-342900">
@@ -12874,7 +12874,7 @@
               <a:buChar char="•"/>
             </a:pPr>
             <a:r>
-              <a:rPr lang="en-US" sz="1200" dirty="0">
+              <a:rPr lang="en-US" sz="1100" dirty="0">
                 <a:solidFill>
                   <a:srgbClr val="FFFFFF"/>
                 </a:solidFill>
@@ -12882,9 +12882,9 @@
                 <a:ea typeface="Arial" pitchFamily="34" charset="-122"/>
                 <a:cs typeface="Arial" pitchFamily="34" charset="-120"/>
               </a:rPr>
-              <a:t>16 · Conciliação de cartão: cartões e "Por tipo de pagamento" do Painel (Config = Agosto).</a:t>
+              <a:t>16 · Conciliação de cartão: só a aba Painel com Config = Agosto (cartões e "Por tipo de pagamento"), em cópia de valores ou em PDF. A aba Vendas não vai, pelo mesmo motivo.</a:t>
             </a:r>
-            <a:endParaRPr lang="en-US" sz="1200" dirty="0"/>
+            <a:endParaRPr lang="en-US" sz="1100" dirty="0"/>
           </a:p>
           <a:p>
             <a:pPr marL="342900" indent="-342900">
@@ -12895,7 +12895,7 @@
               <a:buChar char="•"/>
             </a:pPr>
             <a:r>
-              <a:rPr lang="en-US" sz="1200" dirty="0">
+              <a:rPr lang="en-US" sz="1100" dirty="0">
                 <a:solidFill>
                   <a:srgbClr val="FFFFFF"/>
                 </a:solidFill>
@@ -12903,9 +12903,9 @@
                 <a:ea typeface="Arial" pitchFamily="34" charset="-122"/>
                 <a:cs typeface="Arial" pitchFamily="34" charset="-120"/>
               </a:rPr>
-              <a:t>18 · Resultado mensal (agosto) e 20 · Resumo do mês (bloco único, gerado com o prompt "Caixa 04").</a:t>
+              <a:t>18 · Resultado mensal (agosto) e 20 · Resumo do mês: o bloco único da aba Resumo, que o prompt "Caixa 04" usa para preparar esta reunião.</a:t>
             </a:r>
-            <a:endParaRPr lang="en-US" sz="1200" dirty="0"/>
+            <a:endParaRPr lang="en-US" sz="1100" dirty="0"/>
           </a:p>
           <a:p>
             <a:pPr marL="342900" indent="-342900">
@@ -12916,7 +12916,7 @@
               <a:buChar char="•"/>
             </a:pPr>
             <a:r>
-              <a:rPr lang="en-US" sz="1200" dirty="0">
+              <a:rPr lang="en-US" sz="1100" dirty="0">
                 <a:solidFill>
                   <a:srgbClr val="FFFFFF"/>
                 </a:solidFill>
@@ -12926,7 +12926,7 @@
               </a:rPr>
               <a:t>Fora do kit: extratos bancários de agosto, demonstrativos de pagamento das operadoras e guias pagas.</a:t>
             </a:r>
-            <a:endParaRPr lang="en-US" sz="1200" dirty="0"/>
+            <a:endParaRPr lang="en-US" sz="1100" dirty="0"/>
           </a:p>
         </p:txBody>
       </p:sp>
@@ -12938,8 +12938,8 @@
         </p:nvSpPr>
         <p:spPr>
           <a:xfrm>
-            <a:off x="457200" y="4343400"/>
-            <a:ext cx="7772400" cy="457200"/>
+            <a:off x="457200" y="4297680"/>
+            <a:ext cx="7772400" cy="548640"/>
           </a:xfrm>
           <a:prstGeom prst="rect">
             <a:avLst/>
@@ -12948,14 +12948,14 @@
           <a:ln/>
         </p:spPr>
         <p:txBody>
-          <a:bodyPr wrap="square" lIns="0" tIns="0" rIns="0" bIns="0" rtlCol="0" anchor="ctr"/>
+          <a:bodyPr wrap="square" lIns="0" tIns="0" rIns="0" bIns="0" rtlCol="0" anchor="t"/>
           <a:lstStyle/>
           <a:p>
             <a:pPr indent="0" marL="0">
               <a:buNone/>
             </a:pPr>
             <a:r>
-              <a:rPr lang="en-US" sz="1100" dirty="0">
+              <a:rPr lang="en-US" sz="1050" dirty="0">
                 <a:solidFill>
                   <a:srgbClr val="B89BE0"/>
                 </a:solidFill>
@@ -12963,9 +12963,9 @@
                 <a:ea typeface="Arial" pitchFamily="34" charset="-122"/>
                 <a:cs typeface="Arial" pitchFamily="34" charset="-120"/>
               </a:rPr>
-              <a:t>Tudo em .xlsx, com as fórmulas; o contador não precisa alterar nada. Próxima reunião: 5 de outubro de 2026, com o fechamento de setembro.</a:t>
+              <a:t>Painel em cópia de valores ou em PDF, nunca o arquivo inteiro: nenhuma aba de lançamento sai da clínica. Próxima reunião: 5 de outubro de 2026, com o fechamento de setembro.</a:t>
             </a:r>
-            <a:endParaRPr lang="en-US" sz="1100" dirty="0"/>
+            <a:endParaRPr lang="en-US" sz="1050" dirty="0"/>
           </a:p>
         </p:txBody>
       </p:sp>
